--- a/m4/diapositivos/aula-03-f04.pptx
+++ b/m4/diapositivos/aula-03-f04.pptx
@@ -14665,7 +14665,7 @@
         <p:spPr>
           <a:xfrm>
             <a:off x="1417320" y="3300984"/>
-            <a:ext cx="9174175" cy="981456"/>
+            <a:ext cx="9174175" cy="600456"/>
           </a:xfrm>
           <a:prstGeom prst="rect">
             <a:avLst/>
@@ -14694,7 +14694,7 @@
                 <a:ea typeface="Arial" pitchFamily="34" charset="-122"/>
                 <a:cs typeface="Arial" pitchFamily="34" charset="-120"/>
               </a:rPr>
-              <a:t>Um grande bastaria para muitos; para um grande, nem mil bastam</a:t>
+              <a:t>Um grande fartava muitos; a um grande nem mil bastam</a:t>
             </a:r>
             <a:endParaRPr lang="en-US" sz="2400" dirty="0"/>
           </a:p>
@@ -14708,7 +14708,7 @@
         </p:nvSpPr>
         <p:spPr>
           <a:xfrm>
-            <a:off x="822960" y="4273296"/>
+            <a:off x="822960" y="3892296"/>
             <a:ext cx="365760" cy="365760"/>
           </a:xfrm>
           <a:prstGeom prst="ellipse">
@@ -14733,7 +14733,7 @@
         </p:nvSpPr>
         <p:spPr>
           <a:xfrm>
-            <a:off x="822960" y="4273296"/>
+            <a:off x="822960" y="3892296"/>
             <a:ext cx="365760" cy="365760"/>
           </a:xfrm>
           <a:prstGeom prst="rect">
@@ -14772,8 +14772,8 @@
         </p:nvSpPr>
         <p:spPr>
           <a:xfrm>
-            <a:off x="1417320" y="4282440"/>
-            <a:ext cx="9174175" cy="600456"/>
+            <a:off x="1417320" y="3901440"/>
+            <a:ext cx="9174175" cy="981456"/>
           </a:xfrm>
           <a:prstGeom prst="rect">
             <a:avLst/>
@@ -14802,7 +14802,7 @@
                 <a:ea typeface="Arial" pitchFamily="34" charset="-122"/>
                 <a:cs typeface="Arial" pitchFamily="34" charset="-120"/>
               </a:rPr>
-              <a:t>Seria um castigo justo para os grandes</a:t>
+              <a:t>Seria um castigo justo para os grandes, que o merecem</a:t>
             </a:r>
             <a:endParaRPr lang="en-US" sz="2400" dirty="0"/>
           </a:p>
@@ -14910,7 +14910,7 @@
                 <a:ea typeface="Arial" pitchFamily="34" charset="-122"/>
                 <a:cs typeface="Arial" pitchFamily="34" charset="-120"/>
               </a:rPr>
-              <a:t>Os pequenos são mais fracos e não se defendem</a:t>
+              <a:t>Os pequenos são mais fracos e não se sabem defender</a:t>
             </a:r>
             <a:endParaRPr lang="en-US" sz="2400" dirty="0"/>
           </a:p>
@@ -15161,7 +15161,7 @@
                 <a:ea typeface="Arial" pitchFamily="34" charset="-122"/>
                 <a:cs typeface="Arial" pitchFamily="34" charset="-120"/>
               </a:rPr>
-              <a:t>Um grande bastaria para muitos; para um grande, nem mil bastam</a:t>
+              <a:t>Um grande fartava muitos; a um grande nem mil bastam</a:t>
             </a:r>
             <a:endParaRPr lang="en-US" sz="3400" dirty="0"/>
           </a:p>
